--- a/Schools_ML_Track/camp_2026/slides/DA/DA07.pptx
+++ b/Schools_ML_Track/camp_2026/slides/DA/DA07.pptx
@@ -128,7 +128,7 @@
   <p:extLst>
     <p:ext uri="{521415D9-36F7-43E2-AB2F-B90AF26B5E84}">
       <p14:sectionLst xmlns:p14="http://schemas.microsoft.com/office/powerpoint/2010/main">
-        <p14:section name="Opening" id="{e688ccbf-1b1d-aea6-90b7-557d6f274446}">
+        <p14:section name="Opening" id="{18df3fdd-fe44-37aa-1e71-1660bf06d97b}">
           <p14:sldIdLst>
             <p14:sldId id="256"/>
             <p14:sldId id="257"/>
@@ -139,7 +139,7 @@
             <p14:sldId id="262"/>
           </p14:sldIdLst>
         </p14:section>
-        <p14:section name="Block A" id="{9739636b-3977-758d-4c33-03f52477e3cb}">
+        <p14:section name="Block A" id="{f323c7c0-0a47-c2c9-8d76-c14a5a795be2}">
           <p14:sldIdLst>
             <p14:sldId id="263"/>
             <p14:sldId id="264"/>
@@ -149,15 +149,15 @@
             <p14:sldId id="269"/>
           </p14:sldIdLst>
         </p14:section>
-        <p14:section name="Break" id="{d1864dd4-6422-d093-2033-88b3c7f187bc}">
+        <p14:section name="Break" id="{8e827a42-0ee3-8f16-303f-020756a8a0ce}">
           <p14:sldIdLst>
             <p14:sldId id="267"/>
           </p14:sldIdLst>
         </p14:section>
-        <p14:section name="Block A" id="{79fb60c2-aec0-4ef2-eb83-eea7ff810810}">
+        <p14:section name="Block A" id="{c16d9eea-4786-badb-6807-b44d81623b02}">
           <p14:sldIdLst/>
         </p14:section>
-        <p14:section name="Block B" id="{4c209fb5-a68a-671f-1deb-bea065be118c}">
+        <p14:section name="Block B" id="{39be6d0d-e8dc-7e9a-77a9-4952906c2a2d}">
           <p14:sldIdLst>
             <p14:sldId id="270"/>
             <p14:sldId id="271"/>
@@ -166,7 +166,7 @@
             <p14:sldId id="274"/>
           </p14:sldIdLst>
         </p14:section>
-        <p14:section name="Make and close" id="{0b1027d8-bd16-793b-ad15-a8f6cc52dbe2}">
+        <p14:section name="Make and close" id="{89da512f-3c99-9776-642b-b3563c4ad269}">
           <p14:sldIdLst>
             <p14:sldId id="275"/>
             <p14:sldId id="276"/>

--- a/Schools_ML_Track/camp_2026/slides/DA/DA07.pptx
+++ b/Schools_ML_Track/camp_2026/slides/DA/DA07.pptx
@@ -128,7 +128,7 @@
   <p:extLst>
     <p:ext uri="{521415D9-36F7-43E2-AB2F-B90AF26B5E84}">
       <p14:sectionLst xmlns:p14="http://schemas.microsoft.com/office/powerpoint/2010/main">
-        <p14:section name="Opening" id="{18df3fdd-fe44-37aa-1e71-1660bf06d97b}">
+        <p14:section name="Opening" id="{0408f65d-09b8-b04c-d441-519d43af78a5}">
           <p14:sldIdLst>
             <p14:sldId id="256"/>
             <p14:sldId id="257"/>
@@ -139,7 +139,7 @@
             <p14:sldId id="262"/>
           </p14:sldIdLst>
         </p14:section>
-        <p14:section name="Block A" id="{f323c7c0-0a47-c2c9-8d76-c14a5a795be2}">
+        <p14:section name="Block A" id="{4e9c44b0-1159-e51b-df73-e868bd353d50}">
           <p14:sldIdLst>
             <p14:sldId id="263"/>
             <p14:sldId id="264"/>
@@ -149,15 +149,15 @@
             <p14:sldId id="269"/>
           </p14:sldIdLst>
         </p14:section>
-        <p14:section name="Break" id="{8e827a42-0ee3-8f16-303f-020756a8a0ce}">
+        <p14:section name="Break" id="{28f01e92-bb92-9012-ddd0-85c4636cfa83}">
           <p14:sldIdLst>
             <p14:sldId id="267"/>
           </p14:sldIdLst>
         </p14:section>
-        <p14:section name="Block A" id="{c16d9eea-4786-badb-6807-b44d81623b02}">
+        <p14:section name="Block A" id="{431d2628-fc62-dce2-953e-9c72977cf496}">
           <p14:sldIdLst/>
         </p14:section>
-        <p14:section name="Block B" id="{39be6d0d-e8dc-7e9a-77a9-4952906c2a2d}">
+        <p14:section name="Block B" id="{f0660a74-45e1-1064-4f03-168cd197bb45}">
           <p14:sldIdLst>
             <p14:sldId id="270"/>
             <p14:sldId id="271"/>
@@ -166,7 +166,7 @@
             <p14:sldId id="274"/>
           </p14:sldIdLst>
         </p14:section>
-        <p14:section name="Make and close" id="{89da512f-3c99-9776-642b-b3563c4ad269}">
+        <p14:section name="Make and close" id="{fe4da3cf-8691-b35f-0486-98dc02811429}">
           <p14:sldIdLst>
             <p14:sldId id="275"/>
             <p14:sldId id="276"/>
@@ -3197,7 +3197,24 @@
                 <a:ea typeface="Lato" pitchFamily="34" charset="-122"/>
                 <a:cs typeface="Lato" pitchFamily="34" charset="-120"/>
               </a:rPr>
-              <a:t>A table in Python: DataFrame, columns and reading a CSV</a:t>
+              <a:t>A table in Python: DataFrame,</a:t>
+            </a:r>
+            <a:endParaRPr lang="en-US" sz="5600" dirty="0"/>
+          </a:p>
+          <a:p>
+            <a:pPr algn="l" indent="0" marL="0">
+              <a:buNone/>
+            </a:pPr>
+            <a:r>
+              <a:rPr lang="en-US" sz="5600" b="1" dirty="0">
+                <a:solidFill>
+                  <a:srgbClr val="FFFFFF"/>
+                </a:solidFill>
+                <a:latin typeface="Lato" pitchFamily="34" charset="0"/>
+                <a:ea typeface="Lato" pitchFamily="34" charset="-122"/>
+                <a:cs typeface="Lato" pitchFamily="34" charset="-120"/>
+              </a:rPr>
+              <a:t>columns and reading a CSV</a:t>
             </a:r>
             <a:endParaRPr lang="en-US" sz="5600" dirty="0"/>
           </a:p>
@@ -3647,494 +3664,30 @@
           </a:p>
         </p:txBody>
       </p:sp>
-      <p:sp>
-        <p:nvSpPr>
-          <p:cNvPr id="4" name="Shape 2"/>
-          <p:cNvSpPr/>
+      <p:pic>
+        <p:nvPicPr>
+          <p:cNvPr id="4" name="Image 0" descr="Change one thing">    </p:cNvPr>
+          <p:cNvPicPr>
+            <a:picLocks noChangeAspect="1"/>
+          </p:cNvPicPr>
           <p:nvPr/>
-        </p:nvSpPr>
-        <p:spPr>
-          <a:xfrm>
-            <a:off x="7223760" y="1737360"/>
-            <a:ext cx="4297680" cy="3212592"/>
-          </a:xfrm>
-          <a:prstGeom prst="roundRect">
-            <a:avLst>
-              <a:gd name="adj" fmla="val 2277"/>
-            </a:avLst>
-          </a:prstGeom>
-          <a:solidFill>
-            <a:srgbClr val="111111"/>
-          </a:solidFill>
-          <a:ln/>
-        </p:spPr>
-      </p:sp>
-      <p:sp>
-        <p:nvSpPr>
-          <p:cNvPr id="5" name="Text 3"/>
-          <p:cNvSpPr txBox="1"/>
-          <p:nvPr/>
-        </p:nvSpPr>
-        <p:spPr>
-          <a:xfrm>
-            <a:off x="7424928" y="1938528"/>
-            <a:ext cx="3895344" cy="2810256"/>
-          </a:xfrm>
-          <a:prstGeom prst="rect">
-            <a:avLst/>
-          </a:prstGeom>
-          <a:noFill/>
-          <a:ln/>
-        </p:spPr>
-        <p:txBody>
-          <a:bodyPr wrap="square" lIns="0" tIns="0" rIns="0" bIns="0" rtlCol="0" anchor="t"/>
-          <a:lstStyle/>
-          <a:p>
-            <a:pPr algn="l" indent="0" marL="0">
-              <a:lnSpc>
-                <a:spcPts val="1820"/>
-              </a:lnSpc>
-              <a:buNone/>
-            </a:pPr>
-            <a:r>
-              <a:rPr lang="en-US" sz="1400" b="1" dirty="0">
-                <a:solidFill>
-                  <a:srgbClr val="FFFFFF"/>
-                </a:solidFill>
-                <a:latin typeface="Courier New" pitchFamily="34" charset="0"/>
-                <a:ea typeface="Courier New" pitchFamily="34" charset="-122"/>
-                <a:cs typeface="Courier New" pitchFamily="34" charset="-120"/>
-              </a:rPr>
-              <a:t>import</a:t>
-            </a:r>
-            <a:pPr algn="l" indent="0" marL="0">
-              <a:lnSpc>
-                <a:spcPts val="1820"/>
-              </a:lnSpc>
-              <a:buNone/>
-            </a:pPr>
-            <a:r>
-              <a:rPr lang="en-US" sz="1400" dirty="0">
-                <a:solidFill>
-                  <a:srgbClr val="FFFFFF"/>
-                </a:solidFill>
-                <a:latin typeface="Courier New" pitchFamily="34" charset="0"/>
-                <a:ea typeface="Courier New" pitchFamily="34" charset="-122"/>
-                <a:cs typeface="Courier New" pitchFamily="34" charset="-120"/>
-              </a:rPr>
-              <a:t> pandas </a:t>
-            </a:r>
-            <a:pPr algn="l" indent="0" marL="0">
-              <a:lnSpc>
-                <a:spcPts val="1820"/>
-              </a:lnSpc>
-              <a:buNone/>
-            </a:pPr>
-            <a:r>
-              <a:rPr lang="en-US" sz="1400" b="1" dirty="0">
-                <a:solidFill>
-                  <a:srgbClr val="FFFFFF"/>
-                </a:solidFill>
-                <a:latin typeface="Courier New" pitchFamily="34" charset="0"/>
-                <a:ea typeface="Courier New" pitchFamily="34" charset="-122"/>
-                <a:cs typeface="Courier New" pitchFamily="34" charset="-120"/>
-              </a:rPr>
-              <a:t>as</a:t>
-            </a:r>
-            <a:pPr algn="l" indent="0" marL="0">
-              <a:lnSpc>
-                <a:spcPts val="1820"/>
-              </a:lnSpc>
-              <a:buNone/>
-            </a:pPr>
-            <a:r>
-              <a:rPr lang="en-US" sz="1400" dirty="0">
-                <a:solidFill>
-                  <a:srgbClr val="FFFFFF"/>
-                </a:solidFill>
-                <a:latin typeface="Courier New" pitchFamily="34" charset="0"/>
-                <a:ea typeface="Courier New" pitchFamily="34" charset="-122"/>
-                <a:cs typeface="Courier New" pitchFamily="34" charset="-120"/>
-              </a:rPr>
-              <a:t> pd</a:t>
-            </a:r>
-            <a:endParaRPr lang="en-US" sz="1400" dirty="0"/>
-          </a:p>
-          <a:p>
-            <a:pPr algn="l" indent="0" marL="0">
-              <a:lnSpc>
-                <a:spcPts val="1820"/>
-              </a:lnSpc>
-              <a:buNone/>
-            </a:pPr>
-            <a:r>
-              <a:rPr lang="en-US" sz="1400" dirty="0">
-                <a:solidFill>
-                  <a:srgbClr val="FFFFFF"/>
-                </a:solidFill>
-                <a:latin typeface="Courier New" pitchFamily="34" charset="0"/>
-                <a:ea typeface="Courier New" pitchFamily="34" charset="-122"/>
-                <a:cs typeface="Courier New" pitchFamily="34" charset="-120"/>
-              </a:rPr>
-              <a:t>sales = pd.DataFrame(</a:t>
-            </a:r>
-            <a:endParaRPr lang="en-US" sz="1400" dirty="0"/>
-          </a:p>
-          <a:p>
-            <a:pPr algn="l" indent="0" marL="0">
-              <a:lnSpc>
-                <a:spcPts val="1820"/>
-              </a:lnSpc>
-              <a:buNone/>
-            </a:pPr>
-            <a:r>
-              <a:rPr lang="en-US" sz="1400" dirty="0">
-                <a:solidFill>
-                  <a:srgbClr val="FFFFFF"/>
-                </a:solidFill>
-                <a:latin typeface="Courier New" pitchFamily="34" charset="0"/>
-                <a:ea typeface="Courier New" pitchFamily="34" charset="-122"/>
-                <a:cs typeface="Courier New" pitchFamily="34" charset="-120"/>
-              </a:rPr>
-              <a:t>    {</a:t>
-            </a:r>
-            <a:endParaRPr lang="en-US" sz="1400" dirty="0"/>
-          </a:p>
-          <a:p>
-            <a:pPr algn="l" indent="0" marL="0">
-              <a:lnSpc>
-                <a:spcPts val="1820"/>
-              </a:lnSpc>
-              <a:buNone/>
-            </a:pPr>
-            <a:r>
-              <a:rPr lang="en-US" sz="1400" dirty="0">
-                <a:solidFill>
-                  <a:srgbClr val="FFFFFF"/>
-                </a:solidFill>
-                <a:latin typeface="Courier New" pitchFamily="34" charset="0"/>
-                <a:ea typeface="Courier New" pitchFamily="34" charset="-122"/>
-                <a:cs typeface="Courier New" pitchFamily="34" charset="-120"/>
-              </a:rPr>
-              <a:t>        </a:t>
-            </a:r>
-            <a:pPr algn="l" indent="0" marL="0">
-              <a:lnSpc>
-                <a:spcPts val="1820"/>
-              </a:lnSpc>
-              <a:buNone/>
-            </a:pPr>
-            <a:r>
-              <a:rPr lang="en-US" sz="1400" dirty="0">
-                <a:solidFill>
-                  <a:srgbClr val="E0BE36"/>
-                </a:solidFill>
-                <a:latin typeface="Courier New" pitchFamily="34" charset="0"/>
-                <a:ea typeface="Courier New" pitchFamily="34" charset="-122"/>
-                <a:cs typeface="Courier New" pitchFamily="34" charset="-120"/>
-              </a:rPr>
-              <a:t>"item"</a:t>
-            </a:r>
-            <a:pPr algn="l" indent="0" marL="0">
-              <a:lnSpc>
-                <a:spcPts val="1820"/>
-              </a:lnSpc>
-              <a:buNone/>
-            </a:pPr>
-            <a:r>
-              <a:rPr lang="en-US" sz="1400" dirty="0">
-                <a:solidFill>
-                  <a:srgbClr val="FFFFFF"/>
-                </a:solidFill>
-                <a:latin typeface="Courier New" pitchFamily="34" charset="0"/>
-                <a:ea typeface="Courier New" pitchFamily="34" charset="-122"/>
-                <a:cs typeface="Courier New" pitchFamily="34" charset="-120"/>
-              </a:rPr>
-              <a:t>: [</a:t>
-            </a:r>
-            <a:endParaRPr lang="en-US" sz="1400" dirty="0"/>
-          </a:p>
-          <a:p>
-            <a:pPr algn="l" indent="0" marL="0">
-              <a:lnSpc>
-                <a:spcPts val="1820"/>
-              </a:lnSpc>
-              <a:buNone/>
-            </a:pPr>
-            <a:r>
-              <a:rPr lang="en-US" sz="1400" dirty="0">
-                <a:solidFill>
-                  <a:srgbClr val="FFFFFF"/>
-                </a:solidFill>
-                <a:latin typeface="Courier New" pitchFamily="34" charset="0"/>
-                <a:ea typeface="Courier New" pitchFamily="34" charset="-122"/>
-                <a:cs typeface="Courier New" pitchFamily="34" charset="-120"/>
-              </a:rPr>
-              <a:t>            </a:t>
-            </a:r>
-            <a:pPr algn="l" indent="0" marL="0">
-              <a:lnSpc>
-                <a:spcPts val="1820"/>
-              </a:lnSpc>
-              <a:buNone/>
-            </a:pPr>
-            <a:r>
-              <a:rPr lang="en-US" sz="1400" dirty="0">
-                <a:solidFill>
-                  <a:srgbClr val="E0BE36"/>
-                </a:solidFill>
-                <a:latin typeface="Courier New" pitchFamily="34" charset="0"/>
-                <a:ea typeface="Courier New" pitchFamily="34" charset="-122"/>
-                <a:cs typeface="Courier New" pitchFamily="34" charset="-120"/>
-              </a:rPr>
-              <a:t>"Book"</a:t>
-            </a:r>
-            <a:pPr algn="l" indent="0" marL="0">
-              <a:lnSpc>
-                <a:spcPts val="1820"/>
-              </a:lnSpc>
-              <a:buNone/>
-            </a:pPr>
-            <a:r>
-              <a:rPr lang="en-US" sz="1400" dirty="0">
-                <a:solidFill>
-                  <a:srgbClr val="FFFFFF"/>
-                </a:solidFill>
-                <a:latin typeface="Courier New" pitchFamily="34" charset="0"/>
-                <a:ea typeface="Courier New" pitchFamily="34" charset="-122"/>
-                <a:cs typeface="Courier New" pitchFamily="34" charset="-120"/>
-              </a:rPr>
-              <a:t>, </a:t>
-            </a:r>
-            <a:pPr algn="l" indent="0" marL="0">
-              <a:lnSpc>
-                <a:spcPts val="1820"/>
-              </a:lnSpc>
-              <a:buNone/>
-            </a:pPr>
-            <a:r>
-              <a:rPr lang="en-US" sz="1400" dirty="0">
-                <a:solidFill>
-                  <a:srgbClr val="E0BE36"/>
-                </a:solidFill>
-                <a:latin typeface="Courier New" pitchFamily="34" charset="0"/>
-                <a:ea typeface="Courier New" pitchFamily="34" charset="-122"/>
-                <a:cs typeface="Courier New" pitchFamily="34" charset="-120"/>
-              </a:rPr>
-              <a:t>"Pen"</a:t>
-            </a:r>
-            <a:pPr algn="l" indent="0" marL="0">
-              <a:lnSpc>
-                <a:spcPts val="1820"/>
-              </a:lnSpc>
-              <a:buNone/>
-            </a:pPr>
-            <a:r>
-              <a:rPr lang="en-US" sz="1400" dirty="0">
-                <a:solidFill>
-                  <a:srgbClr val="FFFFFF"/>
-                </a:solidFill>
-                <a:latin typeface="Courier New" pitchFamily="34" charset="0"/>
-                <a:ea typeface="Courier New" pitchFamily="34" charset="-122"/>
-                <a:cs typeface="Courier New" pitchFamily="34" charset="-120"/>
-              </a:rPr>
-              <a:t>, </a:t>
-            </a:r>
-            <a:pPr algn="l" indent="0" marL="0">
-              <a:lnSpc>
-                <a:spcPts val="1820"/>
-              </a:lnSpc>
-              <a:buNone/>
-            </a:pPr>
-            <a:r>
-              <a:rPr lang="en-US" sz="1400" dirty="0">
-                <a:solidFill>
-                  <a:srgbClr val="E0BE36"/>
-                </a:solidFill>
-                <a:latin typeface="Courier New" pitchFamily="34" charset="0"/>
-                <a:ea typeface="Courier New" pitchFamily="34" charset="-122"/>
-                <a:cs typeface="Courier New" pitchFamily="34" charset="-120"/>
-              </a:rPr>
-              <a:t>"Book"</a:t>
-            </a:r>
-            <a:endParaRPr lang="en-US" sz="1400" dirty="0"/>
-          </a:p>
-          <a:p>
-            <a:pPr algn="l" indent="0" marL="0">
-              <a:lnSpc>
-                <a:spcPts val="1820"/>
-              </a:lnSpc>
-              <a:buNone/>
-            </a:pPr>
-            <a:r>
-              <a:rPr lang="en-US" sz="1400" dirty="0">
-                <a:solidFill>
-                  <a:srgbClr val="FFFFFF"/>
-                </a:solidFill>
-                <a:latin typeface="Courier New" pitchFamily="34" charset="0"/>
-                <a:ea typeface="Courier New" pitchFamily="34" charset="-122"/>
-                <a:cs typeface="Courier New" pitchFamily="34" charset="-120"/>
-              </a:rPr>
-              <a:t>        ],</a:t>
-            </a:r>
-            <a:endParaRPr lang="en-US" sz="1400" dirty="0"/>
-          </a:p>
-          <a:p>
-            <a:pPr algn="l" indent="0" marL="0">
-              <a:lnSpc>
-                <a:spcPts val="1820"/>
-              </a:lnSpc>
-              <a:buNone/>
-            </a:pPr>
-            <a:r>
-              <a:rPr lang="en-US" sz="1400" dirty="0">
-                <a:solidFill>
-                  <a:srgbClr val="FFFFFF"/>
-                </a:solidFill>
-                <a:latin typeface="Courier New" pitchFamily="34" charset="0"/>
-                <a:ea typeface="Courier New" pitchFamily="34" charset="-122"/>
-                <a:cs typeface="Courier New" pitchFamily="34" charset="-120"/>
-              </a:rPr>
-              <a:t>        </a:t>
-            </a:r>
-            <a:pPr algn="l" indent="0" marL="0">
-              <a:lnSpc>
-                <a:spcPts val="1820"/>
-              </a:lnSpc>
-              <a:buNone/>
-            </a:pPr>
-            <a:r>
-              <a:rPr lang="en-US" sz="1400" dirty="0">
-                <a:solidFill>
-                  <a:srgbClr val="E0BE36"/>
-                </a:solidFill>
-                <a:latin typeface="Courier New" pitchFamily="34" charset="0"/>
-                <a:ea typeface="Courier New" pitchFamily="34" charset="-122"/>
-                <a:cs typeface="Courier New" pitchFamily="34" charset="-120"/>
-              </a:rPr>
-              <a:t>"units"</a:t>
-            </a:r>
-            <a:pPr algn="l" indent="0" marL="0">
-              <a:lnSpc>
-                <a:spcPts val="1820"/>
-              </a:lnSpc>
-              <a:buNone/>
-            </a:pPr>
-            <a:r>
-              <a:rPr lang="en-US" sz="1400" dirty="0">
-                <a:solidFill>
-                  <a:srgbClr val="FFFFFF"/>
-                </a:solidFill>
-                <a:latin typeface="Courier New" pitchFamily="34" charset="0"/>
-                <a:ea typeface="Courier New" pitchFamily="34" charset="-122"/>
-                <a:cs typeface="Courier New" pitchFamily="34" charset="-120"/>
-              </a:rPr>
-              <a:t>: [2, 5, 3]</a:t>
-            </a:r>
-            <a:endParaRPr lang="en-US" sz="1400" dirty="0"/>
-          </a:p>
-          <a:p>
-            <a:pPr algn="l" indent="0" marL="0">
-              <a:lnSpc>
-                <a:spcPts val="1820"/>
-              </a:lnSpc>
-              <a:buNone/>
-            </a:pPr>
-            <a:r>
-              <a:rPr lang="en-US" sz="1400" dirty="0">
-                <a:solidFill>
-                  <a:srgbClr val="FFFFFF"/>
-                </a:solidFill>
-                <a:latin typeface="Courier New" pitchFamily="34" charset="0"/>
-                <a:ea typeface="Courier New" pitchFamily="34" charset="-122"/>
-                <a:cs typeface="Courier New" pitchFamily="34" charset="-120"/>
-              </a:rPr>
-              <a:t>    }</a:t>
-            </a:r>
-            <a:endParaRPr lang="en-US" sz="1400" dirty="0"/>
-          </a:p>
-          <a:p>
-            <a:pPr algn="l" indent="0" marL="0">
-              <a:lnSpc>
-                <a:spcPts val="1820"/>
-              </a:lnSpc>
-              <a:buNone/>
-            </a:pPr>
-            <a:r>
-              <a:rPr lang="en-US" sz="1400" dirty="0">
-                <a:solidFill>
-                  <a:srgbClr val="FFFFFF"/>
-                </a:solidFill>
-                <a:latin typeface="Courier New" pitchFamily="34" charset="0"/>
-                <a:ea typeface="Courier New" pitchFamily="34" charset="-122"/>
-                <a:cs typeface="Courier New" pitchFamily="34" charset="-120"/>
-              </a:rPr>
-              <a:t>)</a:t>
-            </a:r>
-            <a:endParaRPr lang="en-US" sz="1400" dirty="0"/>
-          </a:p>
-          <a:p>
-            <a:pPr algn="l" indent="0" marL="0">
-              <a:lnSpc>
-                <a:spcPts val="1820"/>
-              </a:lnSpc>
-              <a:buNone/>
-            </a:pPr>
-            <a:r>
-              <a:rPr lang="en-US" sz="1400" dirty="0">
-                <a:solidFill>
-                  <a:srgbClr val="FFFFFF"/>
-                </a:solidFill>
-                <a:latin typeface="Courier New" pitchFamily="34" charset="0"/>
-                <a:ea typeface="Courier New" pitchFamily="34" charset="-122"/>
-                <a:cs typeface="Courier New" pitchFamily="34" charset="-120"/>
-              </a:rPr>
-              <a:t>print(sales)</a:t>
-            </a:r>
-            <a:endParaRPr lang="en-US" sz="1400" dirty="0"/>
-          </a:p>
-          <a:p>
-            <a:pPr algn="l" indent="0" marL="0">
-              <a:lnSpc>
-                <a:spcPts val="1820"/>
-              </a:lnSpc>
-              <a:buNone/>
-            </a:pPr>
-            <a:r>
-              <a:rPr lang="en-US" sz="1400" dirty="0">
-                <a:solidFill>
-                  <a:srgbClr val="FFFFFF"/>
-                </a:solidFill>
-                <a:latin typeface="Courier New" pitchFamily="34" charset="0"/>
-                <a:ea typeface="Courier New" pitchFamily="34" charset="-122"/>
-                <a:cs typeface="Courier New" pitchFamily="34" charset="-120"/>
-              </a:rPr>
-              <a:t>print(sales.shape)</a:t>
-            </a:r>
-            <a:endParaRPr lang="en-US" sz="1400" dirty="0"/>
-          </a:p>
-          <a:p>
-            <a:pPr algn="l" indent="0" marL="0">
-              <a:lnSpc>
-                <a:spcPts val="1820"/>
-              </a:lnSpc>
-              <a:buNone/>
-            </a:pPr>
-            <a:r>
-              <a:rPr lang="en-US" sz="1400" dirty="0">
-                <a:solidFill>
-                  <a:srgbClr val="FFFFFF"/>
-                </a:solidFill>
-                <a:latin typeface="Courier New" pitchFamily="34" charset="0"/>
-                <a:ea typeface="Courier New" pitchFamily="34" charset="-122"/>
-                <a:cs typeface="Courier New" pitchFamily="34" charset="-120"/>
-              </a:rPr>
-              <a:t>print(list(sales.columns))</a:t>
-            </a:r>
-            <a:endParaRPr lang="en-US" sz="1400" dirty="0"/>
-          </a:p>
-        </p:txBody>
-      </p:sp>
+        </p:nvPicPr>
+        <p:blipFill>
+          <a:blip r:embed="rId1"/>
+          <a:stretch>
+            <a:fillRect/>
+          </a:stretch>
+        </p:blipFill>
+        <p:spPr>
+          <a:xfrm>
+            <a:off x="9418320" y="2103120"/>
+            <a:ext cx="1828800" cy="1828800"/>
+          </a:xfrm>
+          <a:prstGeom prst="rect">
+            <a:avLst/>
+          </a:prstGeom>
+        </p:spPr>
+      </p:pic>
       <p:sp>
         <p:nvSpPr>
           <p:cNvPr id="25" name="Slide Number Placeholder 0"/>
@@ -6358,15 +5911,15 @@
           <a:p>
             <a:pPr algn="l" indent="0" marL="0">
               <a:lnSpc>
-                <a:spcPts val="3600"/>
+                <a:spcPts val="3360"/>
               </a:lnSpc>
               <a:spcAft>
-                <a:spcPts val="2520"/>
+                <a:spcPts val="2020"/>
               </a:spcAft>
               <a:buNone/>
             </a:pPr>
             <a:r>
-              <a:rPr lang="en-US" sz="3000" dirty="0">
+              <a:rPr lang="en-US" sz="2800" dirty="0">
                 <a:solidFill>
                   <a:srgbClr val="111111"/>
                 </a:solidFill>
@@ -6374,22 +5927,22 @@
                 <a:ea typeface="Lato" pitchFamily="34" charset="-122"/>
                 <a:cs typeface="Lato" pitchFamily="34" charset="-120"/>
               </a:rPr>
-              <a:t>Read sunrise_sales.csv, the Sunrise Shops sales. Print its shape and its column names. Write which column holds the date and which holds the price of one unit.</a:t>
-            </a:r>
-            <a:endParaRPr lang="en-US" sz="3000" dirty="0"/>
-          </a:p>
-          <a:p>
-            <a:pPr algn="l" indent="0" marL="0">
-              <a:lnSpc>
-                <a:spcPts val="3600"/>
+              <a:t>Read sunrise_sales.csv, the Sunrise Shops sales.</a:t>
+            </a:r>
+            <a:endParaRPr lang="en-US" sz="2800" dirty="0"/>
+          </a:p>
+          <a:p>
+            <a:pPr algn="l" indent="0" marL="0">
+              <a:lnSpc>
+                <a:spcPts val="3360"/>
               </a:lnSpc>
               <a:spcAft>
-                <a:spcPts val="2520"/>
+                <a:spcPts val="2020"/>
               </a:spcAft>
               <a:buNone/>
             </a:pPr>
             <a:r>
-              <a:rPr lang="en-US" sz="3000" dirty="0">
+              <a:rPr lang="en-US" sz="2800" dirty="0">
                 <a:solidFill>
                   <a:srgbClr val="111111"/>
                 </a:solidFill>
@@ -6397,9 +5950,55 @@
                 <a:ea typeface="Lato" pitchFamily="34" charset="-122"/>
                 <a:cs typeface="Lato" pitchFamily="34" charset="-120"/>
               </a:rPr>
+              <a:t>Print its shape and its column names.</a:t>
+            </a:r>
+            <a:endParaRPr lang="en-US" sz="2800" dirty="0"/>
+          </a:p>
+          <a:p>
+            <a:pPr algn="l" indent="0" marL="0">
+              <a:lnSpc>
+                <a:spcPts val="3360"/>
+              </a:lnSpc>
+              <a:spcAft>
+                <a:spcPts val="2020"/>
+              </a:spcAft>
+              <a:buNone/>
+            </a:pPr>
+            <a:r>
+              <a:rPr lang="en-US" sz="2800" dirty="0">
+                <a:solidFill>
+                  <a:srgbClr val="111111"/>
+                </a:solidFill>
+                <a:latin typeface="Lato" pitchFamily="34" charset="0"/>
+                <a:ea typeface="Lato" pitchFamily="34" charset="-122"/>
+                <a:cs typeface="Lato" pitchFamily="34" charset="-120"/>
+              </a:rPr>
+              <a:t>Write which column holds the date and which holds the price of one unit.</a:t>
+            </a:r>
+            <a:endParaRPr lang="en-US" sz="2800" dirty="0"/>
+          </a:p>
+          <a:p>
+            <a:pPr algn="l" indent="0" marL="0">
+              <a:lnSpc>
+                <a:spcPts val="3360"/>
+              </a:lnSpc>
+              <a:spcAft>
+                <a:spcPts val="2020"/>
+              </a:spcAft>
+              <a:buNone/>
+            </a:pPr>
+            <a:r>
+              <a:rPr lang="en-US" sz="2800" dirty="0">
+                <a:solidFill>
+                  <a:srgbClr val="111111"/>
+                </a:solidFill>
+                <a:latin typeface="Lato" pitchFamily="34" charset="0"/>
+                <a:ea typeface="Lato" pitchFamily="34" charset="-122"/>
+                <a:cs typeface="Lato" pitchFamily="34" charset="-120"/>
+              </a:rPr>
               <a:t>Save it as DA07. Write two sentences: what you changed and how you checked it.</a:t>
             </a:r>
-            <a:endParaRPr lang="en-US" sz="3000" dirty="0"/>
+            <a:endParaRPr lang="en-US" sz="2800" dirty="0"/>
           </a:p>
         </p:txBody>
       </p:sp>
@@ -9109,11 +8708,11 @@
         <p:spPr>
           <a:xfrm>
             <a:off x="640080" y="1645920"/>
-            <a:ext cx="10881360" cy="2981452"/>
+            <a:ext cx="10881360" cy="1842262"/>
           </a:xfrm>
           <a:prstGeom prst="roundRect">
             <a:avLst>
-              <a:gd name="adj" fmla="val 2454"/>
+              <a:gd name="adj" fmla="val 3971"/>
             </a:avLst>
           </a:prstGeom>
           <a:solidFill>
@@ -9131,7 +8730,7 @@
         <p:spPr>
           <a:xfrm>
             <a:off x="841248" y="1847088"/>
-            <a:ext cx="10479024" cy="2579116"/>
+            <a:ext cx="10479024" cy="1439926"/>
           </a:xfrm>
           <a:prstGeom prst="rect">
             <a:avLst/>
@@ -9145,12 +8744,12 @@
           <a:p>
             <a:pPr algn="l" indent="0" marL="0">
               <a:lnSpc>
-                <a:spcPts val="2860"/>
-              </a:lnSpc>
-              <a:buNone/>
-            </a:pPr>
-            <a:r>
-              <a:rPr lang="en-US" sz="2200" b="1" dirty="0">
+                <a:spcPts val="2210"/>
+              </a:lnSpc>
+              <a:buNone/>
+            </a:pPr>
+            <a:r>
+              <a:rPr lang="en-US" sz="1700" b="1" dirty="0">
                 <a:solidFill>
                   <a:srgbClr val="FFFFFF"/>
                 </a:solidFill>
@@ -9162,12 +8761,12 @@
             </a:r>
             <a:pPr algn="l" indent="0" marL="0">
               <a:lnSpc>
-                <a:spcPts val="2860"/>
-              </a:lnSpc>
-              <a:buNone/>
-            </a:pPr>
-            <a:r>
-              <a:rPr lang="en-US" sz="2200" dirty="0">
+                <a:spcPts val="2210"/>
+              </a:lnSpc>
+              <a:buNone/>
+            </a:pPr>
+            <a:r>
+              <a:rPr lang="en-US" sz="1700" dirty="0">
                 <a:solidFill>
                   <a:srgbClr val="FFFFFF"/>
                 </a:solidFill>
@@ -9179,12 +8778,12 @@
             </a:r>
             <a:pPr algn="l" indent="0" marL="0">
               <a:lnSpc>
-                <a:spcPts val="2860"/>
-              </a:lnSpc>
-              <a:buNone/>
-            </a:pPr>
-            <a:r>
-              <a:rPr lang="en-US" sz="2200" b="1" dirty="0">
+                <a:spcPts val="2210"/>
+              </a:lnSpc>
+              <a:buNone/>
+            </a:pPr>
+            <a:r>
+              <a:rPr lang="en-US" sz="1700" b="1" dirty="0">
                 <a:solidFill>
                   <a:srgbClr val="FFFFFF"/>
                 </a:solidFill>
@@ -9196,12 +8795,12 @@
             </a:r>
             <a:pPr algn="l" indent="0" marL="0">
               <a:lnSpc>
-                <a:spcPts val="2860"/>
-              </a:lnSpc>
-              <a:buNone/>
-            </a:pPr>
-            <a:r>
-              <a:rPr lang="en-US" sz="2200" dirty="0">
+                <a:spcPts val="2210"/>
+              </a:lnSpc>
+              <a:buNone/>
+            </a:pPr>
+            <a:r>
+              <a:rPr lang="en-US" sz="1700" dirty="0">
                 <a:solidFill>
                   <a:srgbClr val="FFFFFF"/>
                 </a:solidFill>
@@ -9211,17 +8810,17 @@
               </a:rPr>
               <a:t> pd</a:t>
             </a:r>
-            <a:endParaRPr lang="en-US" sz="2200" dirty="0"/>
-          </a:p>
-          <a:p>
-            <a:pPr algn="l" indent="0" marL="0">
-              <a:lnSpc>
-                <a:spcPts val="2860"/>
-              </a:lnSpc>
-              <a:buNone/>
-            </a:pPr>
-            <a:r>
-              <a:rPr lang="en-US" sz="2200" dirty="0">
+            <a:endParaRPr lang="en-US" sz="1700" dirty="0"/>
+          </a:p>
+          <a:p>
+            <a:pPr algn="l" indent="0" marL="0">
+              <a:lnSpc>
+                <a:spcPts val="2210"/>
+              </a:lnSpc>
+              <a:buNone/>
+            </a:pPr>
+            <a:r>
+              <a:rPr lang="en-US" sz="1700" dirty="0">
                 <a:solidFill>
                   <a:srgbClr val="FFFFFF"/>
                 </a:solidFill>
@@ -9229,189 +8828,189 @@
                 <a:ea typeface="Courier New" pitchFamily="34" charset="-122"/>
                 <a:cs typeface="Courier New" pitchFamily="34" charset="-120"/>
               </a:rPr>
-              <a:t>sales = pd.DataFrame(</a:t>
-            </a:r>
-            <a:endParaRPr lang="en-US" sz="2200" dirty="0"/>
-          </a:p>
-          <a:p>
-            <a:pPr algn="l" indent="0" marL="0">
-              <a:lnSpc>
-                <a:spcPts val="2860"/>
-              </a:lnSpc>
-              <a:buNone/>
-            </a:pPr>
-            <a:r>
-              <a:rPr lang="en-US" sz="2200" dirty="0">
-                <a:solidFill>
-                  <a:srgbClr val="FFFFFF"/>
+              <a:t>sales = pd.DataFrame({</a:t>
+            </a:r>
+            <a:pPr algn="l" indent="0" marL="0">
+              <a:lnSpc>
+                <a:spcPts val="2210"/>
+              </a:lnSpc>
+              <a:buNone/>
+            </a:pPr>
+            <a:r>
+              <a:rPr lang="en-US" sz="1700" dirty="0">
+                <a:solidFill>
+                  <a:srgbClr val="E0BE36"/>
                 </a:solidFill>
                 <a:latin typeface="Courier New" pitchFamily="34" charset="0"/>
                 <a:ea typeface="Courier New" pitchFamily="34" charset="-122"/>
                 <a:cs typeface="Courier New" pitchFamily="34" charset="-120"/>
               </a:rPr>
-              <a:t>    {</a:t>
-            </a:r>
-            <a:pPr algn="l" indent="0" marL="0">
-              <a:lnSpc>
-                <a:spcPts val="2860"/>
-              </a:lnSpc>
-              <a:buNone/>
-            </a:pPr>
-            <a:r>
-              <a:rPr lang="en-US" sz="2200" dirty="0">
-                <a:solidFill>
-                  <a:srgbClr val="E0BE36"/>
+              <a:t>"item"</a:t>
+            </a:r>
+            <a:pPr algn="l" indent="0" marL="0">
+              <a:lnSpc>
+                <a:spcPts val="2210"/>
+              </a:lnSpc>
+              <a:buNone/>
+            </a:pPr>
+            <a:r>
+              <a:rPr lang="en-US" sz="1700" dirty="0">
+                <a:solidFill>
+                  <a:srgbClr val="FFFFFF"/>
                 </a:solidFill>
                 <a:latin typeface="Courier New" pitchFamily="34" charset="0"/>
                 <a:ea typeface="Courier New" pitchFamily="34" charset="-122"/>
                 <a:cs typeface="Courier New" pitchFamily="34" charset="-120"/>
               </a:rPr>
-              <a:t>"item"</a:t>
-            </a:r>
-            <a:pPr algn="l" indent="0" marL="0">
-              <a:lnSpc>
-                <a:spcPts val="2860"/>
-              </a:lnSpc>
-              <a:buNone/>
-            </a:pPr>
-            <a:r>
-              <a:rPr lang="en-US" sz="2200" dirty="0">
-                <a:solidFill>
-                  <a:srgbClr val="FFFFFF"/>
+              <a:t>: [</a:t>
+            </a:r>
+            <a:pPr algn="l" indent="0" marL="0">
+              <a:lnSpc>
+                <a:spcPts val="2210"/>
+              </a:lnSpc>
+              <a:buNone/>
+            </a:pPr>
+            <a:r>
+              <a:rPr lang="en-US" sz="1700" dirty="0">
+                <a:solidFill>
+                  <a:srgbClr val="E0BE36"/>
                 </a:solidFill>
                 <a:latin typeface="Courier New" pitchFamily="34" charset="0"/>
                 <a:ea typeface="Courier New" pitchFamily="34" charset="-122"/>
                 <a:cs typeface="Courier New" pitchFamily="34" charset="-120"/>
               </a:rPr>
-              <a:t>: [</a:t>
-            </a:r>
-            <a:pPr algn="l" indent="0" marL="0">
-              <a:lnSpc>
-                <a:spcPts val="2860"/>
-              </a:lnSpc>
-              <a:buNone/>
-            </a:pPr>
-            <a:r>
-              <a:rPr lang="en-US" sz="2200" dirty="0">
-                <a:solidFill>
-                  <a:srgbClr val="E0BE36"/>
+              <a:t>"Book"</a:t>
+            </a:r>
+            <a:pPr algn="l" indent="0" marL="0">
+              <a:lnSpc>
+                <a:spcPts val="2210"/>
+              </a:lnSpc>
+              <a:buNone/>
+            </a:pPr>
+            <a:r>
+              <a:rPr lang="en-US" sz="1700" dirty="0">
+                <a:solidFill>
+                  <a:srgbClr val="FFFFFF"/>
                 </a:solidFill>
                 <a:latin typeface="Courier New" pitchFamily="34" charset="0"/>
                 <a:ea typeface="Courier New" pitchFamily="34" charset="-122"/>
                 <a:cs typeface="Courier New" pitchFamily="34" charset="-120"/>
               </a:rPr>
-              <a:t>"Book"</a:t>
-            </a:r>
-            <a:pPr algn="l" indent="0" marL="0">
-              <a:lnSpc>
-                <a:spcPts val="2860"/>
-              </a:lnSpc>
-              <a:buNone/>
-            </a:pPr>
-            <a:r>
-              <a:rPr lang="en-US" sz="2200" dirty="0">
-                <a:solidFill>
-                  <a:srgbClr val="FFFFFF"/>
+              <a:t>, </a:t>
+            </a:r>
+            <a:pPr algn="l" indent="0" marL="0">
+              <a:lnSpc>
+                <a:spcPts val="2210"/>
+              </a:lnSpc>
+              <a:buNone/>
+            </a:pPr>
+            <a:r>
+              <a:rPr lang="en-US" sz="1700" dirty="0">
+                <a:solidFill>
+                  <a:srgbClr val="E0BE36"/>
                 </a:solidFill>
                 <a:latin typeface="Courier New" pitchFamily="34" charset="0"/>
                 <a:ea typeface="Courier New" pitchFamily="34" charset="-122"/>
                 <a:cs typeface="Courier New" pitchFamily="34" charset="-120"/>
               </a:rPr>
-              <a:t>, </a:t>
-            </a:r>
-            <a:pPr algn="l" indent="0" marL="0">
-              <a:lnSpc>
-                <a:spcPts val="2860"/>
-              </a:lnSpc>
-              <a:buNone/>
-            </a:pPr>
-            <a:r>
-              <a:rPr lang="en-US" sz="2200" dirty="0">
-                <a:solidFill>
-                  <a:srgbClr val="E0BE36"/>
+              <a:t>"Pen"</a:t>
+            </a:r>
+            <a:pPr algn="l" indent="0" marL="0">
+              <a:lnSpc>
+                <a:spcPts val="2210"/>
+              </a:lnSpc>
+              <a:buNone/>
+            </a:pPr>
+            <a:r>
+              <a:rPr lang="en-US" sz="1700" dirty="0">
+                <a:solidFill>
+                  <a:srgbClr val="FFFFFF"/>
                 </a:solidFill>
                 <a:latin typeface="Courier New" pitchFamily="34" charset="0"/>
                 <a:ea typeface="Courier New" pitchFamily="34" charset="-122"/>
                 <a:cs typeface="Courier New" pitchFamily="34" charset="-120"/>
               </a:rPr>
-              <a:t>"Pen"</a:t>
-            </a:r>
-            <a:pPr algn="l" indent="0" marL="0">
-              <a:lnSpc>
-                <a:spcPts val="2860"/>
-              </a:lnSpc>
-              <a:buNone/>
-            </a:pPr>
-            <a:r>
-              <a:rPr lang="en-US" sz="2200" dirty="0">
-                <a:solidFill>
-                  <a:srgbClr val="FFFFFF"/>
+              <a:t>, </a:t>
+            </a:r>
+            <a:pPr algn="l" indent="0" marL="0">
+              <a:lnSpc>
+                <a:spcPts val="2210"/>
+              </a:lnSpc>
+              <a:buNone/>
+            </a:pPr>
+            <a:r>
+              <a:rPr lang="en-US" sz="1700" dirty="0">
+                <a:solidFill>
+                  <a:srgbClr val="E0BE36"/>
                 </a:solidFill>
                 <a:latin typeface="Courier New" pitchFamily="34" charset="0"/>
                 <a:ea typeface="Courier New" pitchFamily="34" charset="-122"/>
                 <a:cs typeface="Courier New" pitchFamily="34" charset="-120"/>
               </a:rPr>
-              <a:t>, </a:t>
-            </a:r>
-            <a:pPr algn="l" indent="0" marL="0">
-              <a:lnSpc>
-                <a:spcPts val="2860"/>
-              </a:lnSpc>
-              <a:buNone/>
-            </a:pPr>
-            <a:r>
-              <a:rPr lang="en-US" sz="2200" dirty="0">
-                <a:solidFill>
-                  <a:srgbClr val="E0BE36"/>
+              <a:t>"Book"</a:t>
+            </a:r>
+            <a:pPr algn="l" indent="0" marL="0">
+              <a:lnSpc>
+                <a:spcPts val="2210"/>
+              </a:lnSpc>
+              <a:buNone/>
+            </a:pPr>
+            <a:r>
+              <a:rPr lang="en-US" sz="1700" dirty="0">
+                <a:solidFill>
+                  <a:srgbClr val="FFFFFF"/>
                 </a:solidFill>
                 <a:latin typeface="Courier New" pitchFamily="34" charset="0"/>
                 <a:ea typeface="Courier New" pitchFamily="34" charset="-122"/>
                 <a:cs typeface="Courier New" pitchFamily="34" charset="-120"/>
               </a:rPr>
-              <a:t>"Book"</a:t>
-            </a:r>
-            <a:pPr algn="l" indent="0" marL="0">
-              <a:lnSpc>
-                <a:spcPts val="2860"/>
-              </a:lnSpc>
-              <a:buNone/>
-            </a:pPr>
-            <a:r>
-              <a:rPr lang="en-US" sz="2200" dirty="0">
-                <a:solidFill>
-                  <a:srgbClr val="FFFFFF"/>
+              <a:t>], </a:t>
+            </a:r>
+            <a:pPr algn="l" indent="0" marL="0">
+              <a:lnSpc>
+                <a:spcPts val="2210"/>
+              </a:lnSpc>
+              <a:buNone/>
+            </a:pPr>
+            <a:r>
+              <a:rPr lang="en-US" sz="1700" dirty="0">
+                <a:solidFill>
+                  <a:srgbClr val="E0BE36"/>
                 </a:solidFill>
                 <a:latin typeface="Courier New" pitchFamily="34" charset="0"/>
                 <a:ea typeface="Courier New" pitchFamily="34" charset="-122"/>
                 <a:cs typeface="Courier New" pitchFamily="34" charset="-120"/>
               </a:rPr>
-              <a:t>], </a:t>
-            </a:r>
-            <a:pPr algn="l" indent="0" marL="0">
-              <a:lnSpc>
-                <a:spcPts val="2860"/>
-              </a:lnSpc>
-              <a:buNone/>
-            </a:pPr>
-            <a:r>
-              <a:rPr lang="en-US" sz="2200" dirty="0">
-                <a:solidFill>
-                  <a:srgbClr val="E0BE36"/>
+              <a:t>"units"</a:t>
+            </a:r>
+            <a:pPr algn="l" indent="0" marL="0">
+              <a:lnSpc>
+                <a:spcPts val="2210"/>
+              </a:lnSpc>
+              <a:buNone/>
+            </a:pPr>
+            <a:r>
+              <a:rPr lang="en-US" sz="1700" dirty="0">
+                <a:solidFill>
+                  <a:srgbClr val="FFFFFF"/>
                 </a:solidFill>
                 <a:latin typeface="Courier New" pitchFamily="34" charset="0"/>
                 <a:ea typeface="Courier New" pitchFamily="34" charset="-122"/>
                 <a:cs typeface="Courier New" pitchFamily="34" charset="-120"/>
               </a:rPr>
-              <a:t>"units"</a:t>
-            </a:r>
-            <a:pPr algn="l" indent="0" marL="0">
-              <a:lnSpc>
-                <a:spcPts val="2860"/>
-              </a:lnSpc>
-              <a:buNone/>
-            </a:pPr>
-            <a:r>
-              <a:rPr lang="en-US" sz="2200" dirty="0">
+              <a:t>: [2, 5, 3]})</a:t>
+            </a:r>
+            <a:endParaRPr lang="en-US" sz="1700" dirty="0"/>
+          </a:p>
+          <a:p>
+            <a:pPr algn="l" indent="0" marL="0">
+              <a:lnSpc>
+                <a:spcPts val="2210"/>
+              </a:lnSpc>
+              <a:buNone/>
+            </a:pPr>
+            <a:r>
+              <a:rPr lang="en-US" sz="1700" dirty="0">
                 <a:solidFill>
                   <a:srgbClr val="FFFFFF"/>
                 </a:solidFill>
@@ -9419,19 +9018,19 @@
                 <a:ea typeface="Courier New" pitchFamily="34" charset="-122"/>
                 <a:cs typeface="Courier New" pitchFamily="34" charset="-120"/>
               </a:rPr>
-              <a:t>: [2, 5, 3]}</a:t>
-            </a:r>
-            <a:endParaRPr lang="en-US" sz="2200" dirty="0"/>
-          </a:p>
-          <a:p>
-            <a:pPr algn="l" indent="0" marL="0">
-              <a:lnSpc>
-                <a:spcPts val="2860"/>
-              </a:lnSpc>
-              <a:buNone/>
-            </a:pPr>
-            <a:r>
-              <a:rPr lang="en-US" sz="2200" dirty="0">
+              <a:t>print(sales)</a:t>
+            </a:r>
+            <a:endParaRPr lang="en-US" sz="1700" dirty="0"/>
+          </a:p>
+          <a:p>
+            <a:pPr algn="l" indent="0" marL="0">
+              <a:lnSpc>
+                <a:spcPts val="2210"/>
+              </a:lnSpc>
+              <a:buNone/>
+            </a:pPr>
+            <a:r>
+              <a:rPr lang="en-US" sz="1700" dirty="0">
                 <a:solidFill>
                   <a:srgbClr val="FFFFFF"/>
                 </a:solidFill>
@@ -9439,19 +9038,19 @@
                 <a:ea typeface="Courier New" pitchFamily="34" charset="-122"/>
                 <a:cs typeface="Courier New" pitchFamily="34" charset="-120"/>
               </a:rPr>
-              <a:t>)</a:t>
-            </a:r>
-            <a:endParaRPr lang="en-US" sz="2200" dirty="0"/>
-          </a:p>
-          <a:p>
-            <a:pPr algn="l" indent="0" marL="0">
-              <a:lnSpc>
-                <a:spcPts val="2860"/>
-              </a:lnSpc>
-              <a:buNone/>
-            </a:pPr>
-            <a:r>
-              <a:rPr lang="en-US" sz="2200" dirty="0">
+              <a:t>print(sales.shape)</a:t>
+            </a:r>
+            <a:endParaRPr lang="en-US" sz="1700" dirty="0"/>
+          </a:p>
+          <a:p>
+            <a:pPr algn="l" indent="0" marL="0">
+              <a:lnSpc>
+                <a:spcPts val="2210"/>
+              </a:lnSpc>
+              <a:buNone/>
+            </a:pPr>
+            <a:r>
+              <a:rPr lang="en-US" sz="1700" dirty="0">
                 <a:solidFill>
                   <a:srgbClr val="FFFFFF"/>
                 </a:solidFill>
@@ -9459,49 +9058,9 @@
                 <a:ea typeface="Courier New" pitchFamily="34" charset="-122"/>
                 <a:cs typeface="Courier New" pitchFamily="34" charset="-120"/>
               </a:rPr>
-              <a:t>print(sales)</a:t>
-            </a:r>
-            <a:endParaRPr lang="en-US" sz="2200" dirty="0"/>
-          </a:p>
-          <a:p>
-            <a:pPr algn="l" indent="0" marL="0">
-              <a:lnSpc>
-                <a:spcPts val="2860"/>
-              </a:lnSpc>
-              <a:buNone/>
-            </a:pPr>
-            <a:r>
-              <a:rPr lang="en-US" sz="2200" dirty="0">
-                <a:solidFill>
-                  <a:srgbClr val="FFFFFF"/>
-                </a:solidFill>
-                <a:latin typeface="Courier New" pitchFamily="34" charset="0"/>
-                <a:ea typeface="Courier New" pitchFamily="34" charset="-122"/>
-                <a:cs typeface="Courier New" pitchFamily="34" charset="-120"/>
-              </a:rPr>
-              <a:t>print(sales.shape)</a:t>
-            </a:r>
-            <a:endParaRPr lang="en-US" sz="2200" dirty="0"/>
-          </a:p>
-          <a:p>
-            <a:pPr algn="l" indent="0" marL="0">
-              <a:lnSpc>
-                <a:spcPts val="2860"/>
-              </a:lnSpc>
-              <a:buNone/>
-            </a:pPr>
-            <a:r>
-              <a:rPr lang="en-US" sz="2200" dirty="0">
-                <a:solidFill>
-                  <a:srgbClr val="FFFFFF"/>
-                </a:solidFill>
-                <a:latin typeface="Courier New" pitchFamily="34" charset="0"/>
-                <a:ea typeface="Courier New" pitchFamily="34" charset="-122"/>
-                <a:cs typeface="Courier New" pitchFamily="34" charset="-120"/>
-              </a:rPr>
               <a:t>print(list(sales.columns))</a:t>
             </a:r>
-            <a:endParaRPr lang="en-US" sz="2200" dirty="0"/>
+            <a:endParaRPr lang="en-US" sz="1700" dirty="0"/>
           </a:p>
         </p:txBody>
       </p:sp>
@@ -9513,8 +9072,8 @@
         </p:nvSpPr>
         <p:spPr>
           <a:xfrm>
-            <a:off x="640080" y="4810252"/>
-            <a:ext cx="8046720" cy="1453388"/>
+            <a:off x="640080" y="3671062"/>
+            <a:ext cx="8046720" cy="2592578"/>
           </a:xfrm>
           <a:prstGeom prst="rect">
             <a:avLst/>
